--- a/generated/Tier 1 Broker Scorecards/CJ Insurance Group_Broker_Scorecard.pptx
+++ b/generated/Tier 1 Broker Scorecards/CJ Insurance Group_Broker_Scorecard.pptx
@@ -3357,7 +3357,7 @@
                         <a:rPr sz="800">
                           <a:latin typeface="Segoe UI"/>
                         </a:rPr>
-                        <a:t>$1,175,888.79 / $979,701.62 / $234,025.52</a:t>
+                        <a:t>$1,175,888.79 / $980,083.00 / $234,406.90</a:t>
                       </a:r>
                     </a:p>
                   </a:txBody>
@@ -3394,7 +3394,7 @@
                         <a:rPr sz="900">
                           <a:latin typeface="Segoe UI"/>
                         </a:rPr>
-                        <a:t>Tier 1  |  8.48% / 15.00%</a:t>
+                        <a:t>Tier 1  |  9.09% / 15.00%</a:t>
                       </a:r>
                     </a:p>
                   </a:txBody>
@@ -3690,7 +3690,7 @@
                         <a:rPr sz="900">
                           <a:latin typeface="Segoe UI"/>
                         </a:rPr>
-                        <a:t>Fleet Bound Premium: $77,695.05</a:t>
+                        <a:t>Fleet Bound Premium: $74,168.02</a:t>
                       </a:r>
                     </a:p>
                   </a:txBody>
@@ -3727,7 +3727,7 @@
                         <a:rPr sz="900">
                           <a:latin typeface="Segoe UI"/>
                         </a:rPr>
-                        <a:t>Fleet Book %: 33.2%</a:t>
+                        <a:t>Fleet Book %: 31.6%</a:t>
                       </a:r>
                     </a:p>
                   </a:txBody>
@@ -3766,7 +3766,7 @@
                         <a:rPr sz="900">
                           <a:latin typeface="Segoe UI"/>
                         </a:rPr>
-                        <a:t>Non-Fleet Subs: 143  |  Binds: 12</a:t>
+                        <a:t>Non-Fleet Subs: 143  |  Binds: 13</a:t>
                       </a:r>
                     </a:p>
                   </a:txBody>
@@ -3803,7 +3803,7 @@
                         <a:rPr sz="900">
                           <a:latin typeface="Segoe UI"/>
                         </a:rPr>
-                        <a:t>Non-Fleet Bound Premium: $156,330.47</a:t>
+                        <a:t>Non-Fleet Bound Premium: $160,238.88</a:t>
                       </a:r>
                     </a:p>
                   </a:txBody>
@@ -3840,7 +3840,7 @@
                         <a:rPr sz="900">
                           <a:latin typeface="Segoe UI"/>
                         </a:rPr>
-                        <a:t>Non-Fleet Book %: 66.8%</a:t>
+                        <a:t>Non-Fleet Book %: 68.4%</a:t>
                       </a:r>
                     </a:p>
                   </a:txBody>
@@ -4581,7 +4581,7 @@
                         <a:rPr sz="800">
                           <a:latin typeface="Segoe UI"/>
                         </a:rPr>
-                        <a:t>28.6%</a:t>
+                        <a:t>31.4%</a:t>
                       </a:r>
                     </a:p>
                   </a:txBody>
@@ -4707,7 +4707,7 @@
                           </a:solidFill>
                           <a:latin typeface="Segoe UI"/>
                         </a:rPr>
-                        <a:t>4.5%</a:t>
+                        <a:t>9.1%</a:t>
                       </a:r>
                     </a:p>
                   </a:txBody>
@@ -4866,7 +4866,7 @@
                         <a:rPr sz="800">
                           <a:latin typeface="Segoe UI"/>
                         </a:rPr>
-                        <a:t>10</a:t>
+                        <a:t>11</a:t>
                       </a:r>
                     </a:p>
                   </a:txBody>
@@ -4983,7 +4983,7 @@
                           </a:solidFill>
                           <a:latin typeface="Segoe UI"/>
                         </a:rPr>
-                        <a:t>1</a:t>
+                        <a:t>2</a:t>
                       </a:r>
                     </a:p>
                   </a:txBody>
@@ -5262,7 +5262,7 @@
                           </a:solidFill>
                           <a:latin typeface="Segoe UI"/>
                         </a:rPr>
-                        <a:t>$20.0K</a:t>
+                        <a:t>$20.4K</a:t>
                       </a:r>
                     </a:p>
                   </a:txBody>

--- a/generated/Tier 1 Broker Scorecards/CJ Insurance Group_Broker_Scorecard.pptx
+++ b/generated/Tier 1 Broker Scorecards/CJ Insurance Group_Broker_Scorecard.pptx
@@ -3394,7 +3394,7 @@
                         <a:rPr sz="900">
                           <a:latin typeface="Segoe UI"/>
                         </a:rPr>
-                        <a:t>Tier 1  |  9.09% / 15.00%</a:t>
+                        <a:t>Tier 1  |  8.98% / 15.00%</a:t>
                       </a:r>
                     </a:p>
                   </a:txBody>
@@ -3766,7 +3766,7 @@
                         <a:rPr sz="900">
                           <a:latin typeface="Segoe UI"/>
                         </a:rPr>
-                        <a:t>Non-Fleet Subs: 143  |  Binds: 13</a:t>
+                        <a:t>Non-Fleet Subs: 145  |  Binds: 13</a:t>
                       </a:r>
                     </a:p>
                   </a:txBody>
@@ -4428,7 +4428,7 @@
                           </a:solidFill>
                           <a:latin typeface="Segoe UI"/>
                         </a:rPr>
-                        <a:t>22</a:t>
+                        <a:t>24</a:t>
                       </a:r>
                     </a:p>
                   </a:txBody>
@@ -4707,7 +4707,7 @@
                           </a:solidFill>
                           <a:latin typeface="Segoe UI"/>
                         </a:rPr>
-                        <a:t>9.1%</a:t>
+                        <a:t>8.3%</a:t>
                       </a:r>
                     </a:p>
                   </a:txBody>

--- a/generated/Tier 1 Broker Scorecards/CJ Insurance Group_Broker_Scorecard.pptx
+++ b/generated/Tier 1 Broker Scorecards/CJ Insurance Group_Broker_Scorecard.pptx
@@ -3394,7 +3394,7 @@
                         <a:rPr sz="900">
                           <a:latin typeface="Segoe UI"/>
                         </a:rPr>
-                        <a:t>Tier 1  |  8.98% / 15.00%</a:t>
+                        <a:t>Tier 1  |  8.93% / 15.00%</a:t>
                       </a:r>
                     </a:p>
                   </a:txBody>
@@ -3766,7 +3766,7 @@
                         <a:rPr sz="900">
                           <a:latin typeface="Segoe UI"/>
                         </a:rPr>
-                        <a:t>Non-Fleet Subs: 145  |  Binds: 13</a:t>
+                        <a:t>Non-Fleet Subs: 146  |  Binds: 13</a:t>
                       </a:r>
                     </a:p>
                   </a:txBody>
@@ -4428,7 +4428,7 @@
                           </a:solidFill>
                           <a:latin typeface="Segoe UI"/>
                         </a:rPr>
-                        <a:t>24</a:t>
+                        <a:t>25</a:t>
                       </a:r>
                     </a:p>
                   </a:txBody>
@@ -4707,7 +4707,7 @@
                           </a:solidFill>
                           <a:latin typeface="Segoe UI"/>
                         </a:rPr>
-                        <a:t>8.3%</a:t>
+                        <a:t>8.0%</a:t>
                       </a:r>
                     </a:p>
                   </a:txBody>

--- a/generated/Tier 1 Broker Scorecards/CJ Insurance Group_Broker_Scorecard.pptx
+++ b/generated/Tier 1 Broker Scorecards/CJ Insurance Group_Broker_Scorecard.pptx
@@ -3394,7 +3394,7 @@
                         <a:rPr sz="900">
                           <a:latin typeface="Segoe UI"/>
                         </a:rPr>
-                        <a:t>Tier 1  |  8.93% / 15.00%</a:t>
+                        <a:t>Tier 1  |  8.77% / 15.00%</a:t>
                       </a:r>
                     </a:p>
                   </a:txBody>
@@ -3766,7 +3766,7 @@
                         <a:rPr sz="900">
                           <a:latin typeface="Segoe UI"/>
                         </a:rPr>
-                        <a:t>Non-Fleet Subs: 146  |  Binds: 13</a:t>
+                        <a:t>Non-Fleet Subs: 149  |  Binds: 13</a:t>
                       </a:r>
                     </a:p>
                   </a:txBody>
@@ -4428,7 +4428,7 @@
                           </a:solidFill>
                           <a:latin typeface="Segoe UI"/>
                         </a:rPr>
-                        <a:t>25</a:t>
+                        <a:t>28</a:t>
                       </a:r>
                     </a:p>
                   </a:txBody>
@@ -4581,7 +4581,7 @@
                         <a:rPr sz="800">
                           <a:latin typeface="Segoe UI"/>
                         </a:rPr>
-                        <a:t>31.4%</a:t>
+                        <a:t>28.6%</a:t>
                       </a:r>
                     </a:p>
                   </a:txBody>
@@ -4707,7 +4707,7 @@
                           </a:solidFill>
                           <a:latin typeface="Segoe UI"/>
                         </a:rPr>
-                        <a:t>8.0%</a:t>
+                        <a:t>7.1%</a:t>
                       </a:r>
                     </a:p>
                   </a:txBody>
@@ -4866,7 +4866,7 @@
                         <a:rPr sz="800">
                           <a:latin typeface="Segoe UI"/>
                         </a:rPr>
-                        <a:t>11</a:t>
+                        <a:t>10</a:t>
                       </a:r>
                     </a:p>
                   </a:txBody>

--- a/generated/Tier 1 Broker Scorecards/CJ Insurance Group_Broker_Scorecard.pptx
+++ b/generated/Tier 1 Broker Scorecards/CJ Insurance Group_Broker_Scorecard.pptx
@@ -3357,7 +3357,7 @@
                         <a:rPr sz="800">
                           <a:latin typeface="Segoe UI"/>
                         </a:rPr>
-                        <a:t>$1,175,888.79 / $980,083.00 / $234,406.90</a:t>
+                        <a:t>$1,175,888.79 / $980,526.96 / $234,850.86</a:t>
                       </a:r>
                     </a:p>
                   </a:txBody>
@@ -3394,7 +3394,7 @@
                         <a:rPr sz="900">
                           <a:latin typeface="Segoe UI"/>
                         </a:rPr>
-                        <a:t>Tier 1  |  8.77% / 15.00%</a:t>
+                        <a:t>Tier 1  |  8.09% / 15.00%</a:t>
                       </a:r>
                     </a:p>
                   </a:txBody>
@@ -3431,7 +3431,7 @@
                         <a:rPr sz="900">
                           <a:latin typeface="Segoe UI"/>
                         </a:rPr>
-                        <a:t>$1,646,244.31  (14.2% achieved)</a:t>
+                        <a:t>$1,646,244.31  (14.3% achieved)</a:t>
                       </a:r>
                     </a:p>
                   </a:txBody>
@@ -3690,7 +3690,7 @@
                         <a:rPr sz="900">
                           <a:latin typeface="Segoe UI"/>
                         </a:rPr>
-                        <a:t>Fleet Bound Premium: $74,168.02</a:t>
+                        <a:t>Fleet Bound Premium: $76,862.10</a:t>
                       </a:r>
                     </a:p>
                   </a:txBody>
@@ -3727,7 +3727,7 @@
                         <a:rPr sz="900">
                           <a:latin typeface="Segoe UI"/>
                         </a:rPr>
-                        <a:t>Fleet Book %: 31.6%</a:t>
+                        <a:t>Fleet Book %: 32.7%</a:t>
                       </a:r>
                     </a:p>
                   </a:txBody>
@@ -3766,7 +3766,7 @@
                         <a:rPr sz="900">
                           <a:latin typeface="Segoe UI"/>
                         </a:rPr>
-                        <a:t>Non-Fleet Subs: 149  |  Binds: 13</a:t>
+                        <a:t>Non-Fleet Subs: 151  |  Binds: 12</a:t>
                       </a:r>
                     </a:p>
                   </a:txBody>
@@ -3803,7 +3803,7 @@
                         <a:rPr sz="900">
                           <a:latin typeface="Segoe UI"/>
                         </a:rPr>
-                        <a:t>Non-Fleet Bound Premium: $160,238.88</a:t>
+                        <a:t>Non-Fleet Bound Premium: $157,988.76</a:t>
                       </a:r>
                     </a:p>
                   </a:txBody>
@@ -3840,7 +3840,7 @@
                         <a:rPr sz="900">
                           <a:latin typeface="Segoe UI"/>
                         </a:rPr>
-                        <a:t>Non-Fleet Book %: 68.4%</a:t>
+                        <a:t>Non-Fleet Book %: 67.3%</a:t>
                       </a:r>
                     </a:p>
                   </a:txBody>
@@ -4428,7 +4428,7 @@
                           </a:solidFill>
                           <a:latin typeface="Segoe UI"/>
                         </a:rPr>
-                        <a:t>28</a:t>
+                        <a:t>31</a:t>
                       </a:r>
                     </a:p>
                   </a:txBody>
@@ -4581,7 +4581,7 @@
                         <a:rPr sz="800">
                           <a:latin typeface="Segoe UI"/>
                         </a:rPr>
-                        <a:t>28.6%</a:t>
+                        <a:t>31.4%</a:t>
                       </a:r>
                     </a:p>
                   </a:txBody>
@@ -4707,7 +4707,7 @@
                           </a:solidFill>
                           <a:latin typeface="Segoe UI"/>
                         </a:rPr>
-                        <a:t>7.1%</a:t>
+                        <a:t>6.5%</a:t>
                       </a:r>
                     </a:p>
                   </a:txBody>
@@ -4866,7 +4866,7 @@
                         <a:rPr sz="800">
                           <a:latin typeface="Segoe UI"/>
                         </a:rPr>
-                        <a:t>10</a:t>
+                        <a:t>11</a:t>
                       </a:r>
                     </a:p>
                   </a:txBody>
@@ -5262,7 +5262,7 @@
                           </a:solidFill>
                           <a:latin typeface="Segoe UI"/>
                         </a:rPr>
-                        <a:t>$20.4K</a:t>
+                        <a:t>$20.8K</a:t>
                       </a:r>
                     </a:p>
                   </a:txBody>

--- a/generated/Tier 1 Broker Scorecards/CJ Insurance Group_Broker_Scorecard.pptx
+++ b/generated/Tier 1 Broker Scorecards/CJ Insurance Group_Broker_Scorecard.pptx
@@ -4581,7 +4581,7 @@
                         <a:rPr sz="800">
                           <a:latin typeface="Segoe UI"/>
                         </a:rPr>
-                        <a:t>31.4%</a:t>
+                        <a:t>28.6%</a:t>
                       </a:r>
                     </a:p>
                   </a:txBody>
@@ -4866,7 +4866,7 @@
                         <a:rPr sz="800">
                           <a:latin typeface="Segoe UI"/>
                         </a:rPr>
-                        <a:t>11</a:t>
+                        <a:t>10</a:t>
                       </a:r>
                     </a:p>
                   </a:txBody>

--- a/generated/Tier 1 Broker Scorecards/CJ Insurance Group_Broker_Scorecard.pptx
+++ b/generated/Tier 1 Broker Scorecards/CJ Insurance Group_Broker_Scorecard.pptx
@@ -3357,7 +3357,7 @@
                         <a:rPr sz="800">
                           <a:latin typeface="Segoe UI"/>
                         </a:rPr>
-                        <a:t>$1,175,888.79 / $980,526.96 / $234,850.86</a:t>
+                        <a:t>$1,175,888.79 / $984,854.75 / $239,178.65</a:t>
                       </a:r>
                     </a:p>
                   </a:txBody>
@@ -3394,7 +3394,7 @@
                         <a:rPr sz="900">
                           <a:latin typeface="Segoe UI"/>
                         </a:rPr>
-                        <a:t>Tier 1  |  8.09% / 15.00%</a:t>
+                        <a:t>Tier 1  |  8.05% / 15.00%</a:t>
                       </a:r>
                     </a:p>
                   </a:txBody>
@@ -3431,7 +3431,7 @@
                         <a:rPr sz="900">
                           <a:latin typeface="Segoe UI"/>
                         </a:rPr>
-                        <a:t>$1,646,244.31  (14.3% achieved)</a:t>
+                        <a:t>$1,646,244.31  (14.5% achieved)</a:t>
                       </a:r>
                     </a:p>
                   </a:txBody>
@@ -3690,7 +3690,7 @@
                         <a:rPr sz="900">
                           <a:latin typeface="Segoe UI"/>
                         </a:rPr>
-                        <a:t>Fleet Bound Premium: $76,862.10</a:t>
+                        <a:t>Fleet Bound Premium: $78,278.50</a:t>
                       </a:r>
                     </a:p>
                   </a:txBody>
@@ -3766,7 +3766,7 @@
                         <a:rPr sz="900">
                           <a:latin typeface="Segoe UI"/>
                         </a:rPr>
-                        <a:t>Non-Fleet Subs: 151  |  Binds: 12</a:t>
+                        <a:t>Non-Fleet Subs: 152  |  Binds: 12</a:t>
                       </a:r>
                     </a:p>
                   </a:txBody>
@@ -3803,7 +3803,7 @@
                         <a:rPr sz="900">
                           <a:latin typeface="Segoe UI"/>
                         </a:rPr>
-                        <a:t>Non-Fleet Bound Premium: $157,988.76</a:t>
+                        <a:t>Non-Fleet Bound Premium: $160,900.15</a:t>
                       </a:r>
                     </a:p>
                   </a:txBody>
@@ -4423,12 +4423,9 @@
                       <a:pPr algn="ctr"/>
                       <a:r>
                         <a:rPr sz="800">
-                          <a:solidFill>
-                            <a:srgbClr val="DC2626"/>
-                          </a:solidFill>
                           <a:latin typeface="Segoe UI"/>
                         </a:rPr>
-                        <a:t>31</a:t>
+                        <a:t>32</a:t>
                       </a:r>
                     </a:p>
                   </a:txBody>
@@ -4707,7 +4704,7 @@
                           </a:solidFill>
                           <a:latin typeface="Segoe UI"/>
                         </a:rPr>
-                        <a:t>6.5%</a:t>
+                        <a:t>6.2%</a:t>
                       </a:r>
                     </a:p>
                   </a:txBody>
@@ -5262,7 +5259,7 @@
                           </a:solidFill>
                           <a:latin typeface="Segoe UI"/>
                         </a:rPr>
-                        <a:t>$20.8K</a:t>
+                        <a:t>$25.1K</a:t>
                       </a:r>
                     </a:p>
                   </a:txBody>

--- a/generated/Tier 1 Broker Scorecards/CJ Insurance Group_Broker_Scorecard.pptx
+++ b/generated/Tier 1 Broker Scorecards/CJ Insurance Group_Broker_Scorecard.pptx
@@ -3394,7 +3394,7 @@
                         <a:rPr sz="900">
                           <a:latin typeface="Segoe UI"/>
                         </a:rPr>
-                        <a:t>Tier 1  |  8.05% / 15.00%</a:t>
+                        <a:t>Tier 1  |  7.95% / 15.00%</a:t>
                       </a:r>
                     </a:p>
                   </a:txBody>
@@ -3766,7 +3766,7 @@
                         <a:rPr sz="900">
                           <a:latin typeface="Segoe UI"/>
                         </a:rPr>
-                        <a:t>Non-Fleet Subs: 152  |  Binds: 12</a:t>
+                        <a:t>Non-Fleet Subs: 154  |  Binds: 12</a:t>
                       </a:r>
                     </a:p>
                   </a:txBody>
@@ -4423,9 +4423,12 @@
                       <a:pPr algn="ctr"/>
                       <a:r>
                         <a:rPr sz="800">
+                          <a:solidFill>
+                            <a:srgbClr val="059669"/>
+                          </a:solidFill>
                           <a:latin typeface="Segoe UI"/>
                         </a:rPr>
-                        <a:t>32</a:t>
+                        <a:t>34</a:t>
                       </a:r>
                     </a:p>
                   </a:txBody>
@@ -4578,7 +4581,7 @@
                         <a:rPr sz="800">
                           <a:latin typeface="Segoe UI"/>
                         </a:rPr>
-                        <a:t>28.6%</a:t>
+                        <a:t>31.4%</a:t>
                       </a:r>
                     </a:p>
                   </a:txBody>
@@ -4704,7 +4707,7 @@
                           </a:solidFill>
                           <a:latin typeface="Segoe UI"/>
                         </a:rPr>
-                        <a:t>6.2%</a:t>
+                        <a:t>5.9%</a:t>
                       </a:r>
                     </a:p>
                   </a:txBody>
@@ -4863,7 +4866,7 @@
                         <a:rPr sz="800">
                           <a:latin typeface="Segoe UI"/>
                         </a:rPr>
-                        <a:t>10</a:t>
+                        <a:t>11</a:t>
                       </a:r>
                     </a:p>
                   </a:txBody>

--- a/generated/Tier 1 Broker Scorecards/CJ Insurance Group_Broker_Scorecard.pptx
+++ b/generated/Tier 1 Broker Scorecards/CJ Insurance Group_Broker_Scorecard.pptx
@@ -4428,7 +4428,7 @@
                           </a:solidFill>
                           <a:latin typeface="Segoe UI"/>
                         </a:rPr>
-                        <a:t>34</a:t>
+                        <a:t>35</a:t>
                       </a:r>
                     </a:p>
                   </a:txBody>
@@ -4707,7 +4707,7 @@
                           </a:solidFill>
                           <a:latin typeface="Segoe UI"/>
                         </a:rPr>
-                        <a:t>5.9%</a:t>
+                        <a:t>5.7%</a:t>
                       </a:r>
                     </a:p>
                   </a:txBody>

--- a/generated/Tier 1 Broker Scorecards/CJ Insurance Group_Broker_Scorecard.pptx
+++ b/generated/Tier 1 Broker Scorecards/CJ Insurance Group_Broker_Scorecard.pptx
@@ -3357,7 +3357,7 @@
                         <a:rPr sz="800">
                           <a:latin typeface="Segoe UI"/>
                         </a:rPr>
-                        <a:t>$1,175,888.79 / $984,854.75 / $239,178.65</a:t>
+                        <a:t>$1,175,888.79 / $871,708.75 / $239,178.65</a:t>
                       </a:r>
                     </a:p>
                   </a:txBody>
@@ -4581,7 +4581,7 @@
                         <a:rPr sz="800">
                           <a:latin typeface="Segoe UI"/>
                         </a:rPr>
-                        <a:t>28.6%</a:t>
+                        <a:t>31.4%</a:t>
                       </a:r>
                     </a:p>
                   </a:txBody>
@@ -4866,7 +4866,7 @@
                         <a:rPr sz="800">
                           <a:latin typeface="Segoe UI"/>
                         </a:rPr>
-                        <a:t>10</a:t>
+                        <a:t>11</a:t>
                       </a:r>
                     </a:p>
                   </a:txBody>
